--- a/Asynchrony.pptx
+++ b/Asynchrony.pptx
@@ -3944,10 +3944,29 @@
             </a:pPr>
             <a:r>
               <a:rPr lang="en-US" sz="2800" dirty="0"/>
+              <a:t>And who doesn’t love a </a:t>
+            </a:r>
+            <a:r>
+              <a:rPr lang="en-US" sz="2800"/>
+              <a:t>new word?</a:t>
+            </a:r>
+          </a:p>
+          <a:p>
+            <a:pPr marL="0" indent="0">
+              <a:buNone/>
+            </a:pPr>
+            <a:endParaRPr lang="en-US" sz="2800" dirty="0"/>
+          </a:p>
+          <a:p>
+            <a:pPr marL="0" indent="0">
+              <a:buNone/>
+            </a:pPr>
+            <a:r>
+              <a:rPr lang="en-US" sz="2800" dirty="0"/>
               <a:t>But it may just be another word to store in the </a:t>
             </a:r>
             <a:r>
-              <a:rPr lang="en-US" sz="2800"/>
+              <a:rPr lang="en-US" sz="2800" dirty="0" err="1"/>
               <a:t>bikeshed</a:t>
             </a:r>
             <a:r>

--- a/Asynchrony.pptx
+++ b/Asynchrony.pptx
@@ -108,6 +108,11 @@
       </a:defRPr>
     </a:lvl9pPr>
   </p:defaultTextStyle>
+  <p:extLst>
+    <p:ext uri="{EFAFB233-063F-42B5-8137-9DF3F51BA10A}">
+      <p15:sldGuideLst xmlns:p15="http://schemas.microsoft.com/office/powerpoint/2012/main"/>
+    </p:ext>
+  </p:extLst>
 </p:presentation>
 </file>
 
@@ -279,7 +284,7 @@
           <a:p>
             <a:fld id="{3D48AD91-DAED-4A59-87F7-33FD6E0507AC}" type="datetimeFigureOut">
               <a:rPr lang="en-US" smtClean="0"/>
-              <a:t>11/6/2025</a:t>
+              <a:t>11/13/2025</a:t>
             </a:fld>
             <a:endParaRPr lang="en-US"/>
           </a:p>
@@ -507,7 +512,7 @@
           <a:p>
             <a:fld id="{3D48AD91-DAED-4A59-87F7-33FD6E0507AC}" type="datetimeFigureOut">
               <a:rPr lang="en-US" smtClean="0"/>
-              <a:t>11/6/2025</a:t>
+              <a:t>11/13/2025</a:t>
             </a:fld>
             <a:endParaRPr lang="en-US"/>
           </a:p>
@@ -687,7 +692,7 @@
           <a:p>
             <a:fld id="{3D48AD91-DAED-4A59-87F7-33FD6E0507AC}" type="datetimeFigureOut">
               <a:rPr lang="en-US" smtClean="0"/>
-              <a:t>11/6/2025</a:t>
+              <a:t>11/13/2025</a:t>
             </a:fld>
             <a:endParaRPr lang="en-US"/>
           </a:p>
@@ -857,7 +862,7 @@
           <a:p>
             <a:fld id="{3D48AD91-DAED-4A59-87F7-33FD6E0507AC}" type="datetimeFigureOut">
               <a:rPr lang="en-US" smtClean="0"/>
-              <a:t>11/6/2025</a:t>
+              <a:t>11/13/2025</a:t>
             </a:fld>
             <a:endParaRPr lang="en-US"/>
           </a:p>
@@ -1111,7 +1116,7 @@
           <a:p>
             <a:fld id="{3D48AD91-DAED-4A59-87F7-33FD6E0507AC}" type="datetimeFigureOut">
               <a:rPr lang="en-US" smtClean="0"/>
-              <a:t>11/6/2025</a:t>
+              <a:t>11/13/2025</a:t>
             </a:fld>
             <a:endParaRPr lang="en-US"/>
           </a:p>
@@ -1437,7 +1442,7 @@
           <a:p>
             <a:fld id="{3D48AD91-DAED-4A59-87F7-33FD6E0507AC}" type="datetimeFigureOut">
               <a:rPr lang="en-US" smtClean="0"/>
-              <a:t>11/6/2025</a:t>
+              <a:t>11/13/2025</a:t>
             </a:fld>
             <a:endParaRPr lang="en-US"/>
           </a:p>
@@ -1888,7 +1893,7 @@
           <a:p>
             <a:fld id="{3D48AD91-DAED-4A59-87F7-33FD6E0507AC}" type="datetimeFigureOut">
               <a:rPr lang="en-US" smtClean="0"/>
-              <a:t>11/6/2025</a:t>
+              <a:t>11/13/2025</a:t>
             </a:fld>
             <a:endParaRPr lang="en-US"/>
           </a:p>
@@ -2006,7 +2011,7 @@
           <a:p>
             <a:fld id="{3D48AD91-DAED-4A59-87F7-33FD6E0507AC}" type="datetimeFigureOut">
               <a:rPr lang="en-US" smtClean="0"/>
-              <a:t>11/6/2025</a:t>
+              <a:t>11/13/2025</a:t>
             </a:fld>
             <a:endParaRPr lang="en-US"/>
           </a:p>
@@ -2101,7 +2106,7 @@
           <a:p>
             <a:fld id="{3D48AD91-DAED-4A59-87F7-33FD6E0507AC}" type="datetimeFigureOut">
               <a:rPr lang="en-US" smtClean="0"/>
-              <a:t>11/6/2025</a:t>
+              <a:t>11/13/2025</a:t>
             </a:fld>
             <a:endParaRPr lang="en-US"/>
           </a:p>
@@ -2388,7 +2393,7 @@
           <a:p>
             <a:fld id="{3D48AD91-DAED-4A59-87F7-33FD6E0507AC}" type="datetimeFigureOut">
               <a:rPr lang="en-US" smtClean="0"/>
-              <a:t>11/6/2025</a:t>
+              <a:t>11/13/2025</a:t>
             </a:fld>
             <a:endParaRPr lang="en-US"/>
           </a:p>
@@ -2710,7 +2715,7 @@
           <a:p>
             <a:fld id="{3D48AD91-DAED-4A59-87F7-33FD6E0507AC}" type="datetimeFigureOut">
               <a:rPr lang="en-US" smtClean="0"/>
-              <a:t>11/6/2025</a:t>
+              <a:t>11/13/2025</a:t>
             </a:fld>
             <a:endParaRPr lang="en-US"/>
           </a:p>
@@ -2964,7 +2969,7 @@
           <a:p>
             <a:fld id="{3D48AD91-DAED-4A59-87F7-33FD6E0507AC}" type="datetimeFigureOut">
               <a:rPr lang="en-US" smtClean="0"/>
-              <a:t>11/6/2025</a:t>
+              <a:t>11/13/2025</a:t>
             </a:fld>
             <a:endParaRPr lang="en-US"/>
           </a:p>
@@ -3520,8 +3525,8 @@
         </p:nvSpPr>
         <p:spPr>
           <a:xfrm>
-            <a:off x="6330950" y="2387600"/>
-            <a:ext cx="4902200" cy="3139321"/>
+            <a:off x="6261100" y="1305341"/>
+            <a:ext cx="4902200" cy="4247317"/>
           </a:xfrm>
           <a:prstGeom prst="rect">
             <a:avLst/>
@@ -3533,6 +3538,20 @@
             <a:spAutoFit/>
           </a:bodyPr>
           <a:lstStyle/>
+          <a:p>
+            <a:r>
+              <a:rPr lang="en-US" b="1" dirty="0"/>
+              <a:t>Synchrony: </a:t>
+            </a:r>
+            <a:r>
+              <a:rPr lang="en-US" dirty="0"/>
+              <a:t>the requirement that tasks occur in a specific order for the program to be correct.</a:t>
+            </a:r>
+            <a:endParaRPr lang="en-US" b="1" dirty="0"/>
+          </a:p>
+          <a:p>
+            <a:endParaRPr lang="en-US" b="1" dirty="0"/>
+          </a:p>
           <a:p>
             <a:r>
               <a:rPr lang="en-US" b="1" dirty="0"/>
@@ -3644,7 +3663,7 @@
         </p:blipFill>
         <p:spPr>
           <a:xfrm>
-            <a:off x="542925" y="2493486"/>
+            <a:off x="5483225" y="2436336"/>
             <a:ext cx="4943475" cy="2780705"/>
           </a:xfrm>
         </p:spPr>
@@ -3696,8 +3715,8 @@
         </p:nvSpPr>
         <p:spPr>
           <a:xfrm>
-            <a:off x="6438900" y="2690336"/>
-            <a:ext cx="4254500" cy="1477328"/>
+            <a:off x="584200" y="2828835"/>
+            <a:ext cx="4254500" cy="1200329"/>
           </a:xfrm>
           <a:prstGeom prst="rect">
             <a:avLst/>
@@ -3710,9 +3729,33 @@
           </a:bodyPr>
           <a:lstStyle/>
           <a:p>
+            <a:pPr marL="285750" indent="-285750">
+              <a:buFont typeface="Arial" panose="020B0604020202020204" pitchFamily="34" charset="0"/>
+              <a:buChar char="•"/>
+            </a:pPr>
             <a:r>
               <a:rPr lang="en-US" dirty="0"/>
-              <a:t>Not allowing the deduplication of the concepts of asynchrony and concurrency is why we have async function coloring in languages like JavaScript.</a:t>
+              <a:t>Reduce async function coloring in languages like JavaScript.</a:t>
+            </a:r>
+          </a:p>
+          <a:p>
+            <a:pPr marL="285750" indent="-285750">
+              <a:buFont typeface="Arial" panose="020B0604020202020204" pitchFamily="34" charset="0"/>
+              <a:buChar char="•"/>
+            </a:pPr>
+            <a:r>
+              <a:rPr lang="en-US" dirty="0"/>
+              <a:t>Thoughtful API design</a:t>
+            </a:r>
+          </a:p>
+          <a:p>
+            <a:pPr marL="285750" indent="-285750">
+              <a:buFont typeface="Arial" panose="020B0604020202020204" pitchFamily="34" charset="0"/>
+              <a:buChar char="•"/>
+            </a:pPr>
+            <a:r>
+              <a:rPr lang="en-US" dirty="0"/>
+              <a:t>I think it’s neat</a:t>
             </a:r>
           </a:p>
         </p:txBody>
@@ -3727,6 +3770,239 @@
   <p:clrMapOvr>
     <a:masterClrMapping/>
   </p:clrMapOvr>
+  <p:timing>
+    <p:tnLst>
+      <p:par>
+        <p:cTn id="1" dur="indefinite" restart="never" nodeType="tmRoot">
+          <p:childTnLst>
+            <p:seq concurrent="1" nextAc="seek">
+              <p:cTn id="2" dur="indefinite" nodeType="mainSeq">
+                <p:childTnLst>
+                  <p:par>
+                    <p:cTn id="3" fill="hold">
+                      <p:stCondLst>
+                        <p:cond delay="indefinite"/>
+                      </p:stCondLst>
+                      <p:childTnLst>
+                        <p:par>
+                          <p:cTn id="4" fill="hold">
+                            <p:stCondLst>
+                              <p:cond delay="0"/>
+                            </p:stCondLst>
+                            <p:childTnLst>
+                              <p:par>
+                                <p:cTn id="5" presetID="1" presetClass="entr" presetSubtype="0" fill="hold" grpId="0" nodeType="clickEffect">
+                                  <p:stCondLst>
+                                    <p:cond delay="0"/>
+                                  </p:stCondLst>
+                                  <p:childTnLst>
+                                    <p:set>
+                                      <p:cBhvr>
+                                        <p:cTn id="6" dur="1" fill="hold">
+                                          <p:stCondLst>
+                                            <p:cond delay="0"/>
+                                          </p:stCondLst>
+                                        </p:cTn>
+                                        <p:tgtEl>
+                                          <p:spTgt spid="7">
+                                            <p:txEl>
+                                              <p:pRg st="0" end="0"/>
+                                            </p:txEl>
+                                          </p:spTgt>
+                                        </p:tgtEl>
+                                        <p:attrNameLst>
+                                          <p:attrName>style.visibility</p:attrName>
+                                        </p:attrNameLst>
+                                      </p:cBhvr>
+                                      <p:to>
+                                        <p:strVal val="visible"/>
+                                      </p:to>
+                                    </p:set>
+                                  </p:childTnLst>
+                                </p:cTn>
+                              </p:par>
+                            </p:childTnLst>
+                          </p:cTn>
+                        </p:par>
+                      </p:childTnLst>
+                    </p:cTn>
+                  </p:par>
+                  <p:par>
+                    <p:cTn id="7" fill="hold">
+                      <p:stCondLst>
+                        <p:cond delay="indefinite"/>
+                      </p:stCondLst>
+                      <p:childTnLst>
+                        <p:par>
+                          <p:cTn id="8" fill="hold">
+                            <p:stCondLst>
+                              <p:cond delay="0"/>
+                            </p:stCondLst>
+                            <p:childTnLst>
+                              <p:par>
+                                <p:cTn id="9" presetID="1" presetClass="entr" presetSubtype="0" fill="hold" grpId="0" nodeType="clickEffect">
+                                  <p:stCondLst>
+                                    <p:cond delay="0"/>
+                                  </p:stCondLst>
+                                  <p:childTnLst>
+                                    <p:set>
+                                      <p:cBhvr>
+                                        <p:cTn id="10" dur="1" fill="hold">
+                                          <p:stCondLst>
+                                            <p:cond delay="0"/>
+                                          </p:stCondLst>
+                                        </p:cTn>
+                                        <p:tgtEl>
+                                          <p:spTgt spid="7">
+                                            <p:txEl>
+                                              <p:pRg st="1" end="1"/>
+                                            </p:txEl>
+                                          </p:spTgt>
+                                        </p:tgtEl>
+                                        <p:attrNameLst>
+                                          <p:attrName>style.visibility</p:attrName>
+                                        </p:attrNameLst>
+                                      </p:cBhvr>
+                                      <p:to>
+                                        <p:strVal val="visible"/>
+                                      </p:to>
+                                    </p:set>
+                                  </p:childTnLst>
+                                </p:cTn>
+                              </p:par>
+                            </p:childTnLst>
+                          </p:cTn>
+                        </p:par>
+                      </p:childTnLst>
+                    </p:cTn>
+                  </p:par>
+                  <p:par>
+                    <p:cTn id="11" fill="hold">
+                      <p:stCondLst>
+                        <p:cond delay="indefinite"/>
+                      </p:stCondLst>
+                      <p:childTnLst>
+                        <p:par>
+                          <p:cTn id="12" fill="hold">
+                            <p:stCondLst>
+                              <p:cond delay="0"/>
+                            </p:stCondLst>
+                            <p:childTnLst>
+                              <p:par>
+                                <p:cTn id="13" presetID="1" presetClass="entr" presetSubtype="0" fill="hold" grpId="0" nodeType="clickEffect">
+                                  <p:stCondLst>
+                                    <p:cond delay="0"/>
+                                  </p:stCondLst>
+                                  <p:childTnLst>
+                                    <p:set>
+                                      <p:cBhvr>
+                                        <p:cTn id="14" dur="1" fill="hold">
+                                          <p:stCondLst>
+                                            <p:cond delay="0"/>
+                                          </p:stCondLst>
+                                        </p:cTn>
+                                        <p:tgtEl>
+                                          <p:spTgt spid="7">
+                                            <p:txEl>
+                                              <p:pRg st="2" end="2"/>
+                                            </p:txEl>
+                                          </p:spTgt>
+                                        </p:tgtEl>
+                                        <p:attrNameLst>
+                                          <p:attrName>style.visibility</p:attrName>
+                                        </p:attrNameLst>
+                                      </p:cBhvr>
+                                      <p:to>
+                                        <p:strVal val="visible"/>
+                                      </p:to>
+                                    </p:set>
+                                  </p:childTnLst>
+                                </p:cTn>
+                              </p:par>
+                            </p:childTnLst>
+                          </p:cTn>
+                        </p:par>
+                      </p:childTnLst>
+                    </p:cTn>
+                  </p:par>
+                  <p:par>
+                    <p:cTn id="15" fill="hold">
+                      <p:stCondLst>
+                        <p:cond delay="indefinite"/>
+                      </p:stCondLst>
+                      <p:childTnLst>
+                        <p:par>
+                          <p:cTn id="16" fill="hold">
+                            <p:stCondLst>
+                              <p:cond delay="0"/>
+                            </p:stCondLst>
+                            <p:childTnLst>
+                              <p:par>
+                                <p:cTn id="17" presetID="10" presetClass="entr" presetSubtype="0" fill="hold" nodeType="clickEffect">
+                                  <p:stCondLst>
+                                    <p:cond delay="0"/>
+                                  </p:stCondLst>
+                                  <p:childTnLst>
+                                    <p:set>
+                                      <p:cBhvr>
+                                        <p:cTn id="18" dur="1" fill="hold">
+                                          <p:stCondLst>
+                                            <p:cond delay="0"/>
+                                          </p:stCondLst>
+                                        </p:cTn>
+                                        <p:tgtEl>
+                                          <p:spTgt spid="5"/>
+                                        </p:tgtEl>
+                                        <p:attrNameLst>
+                                          <p:attrName>style.visibility</p:attrName>
+                                        </p:attrNameLst>
+                                      </p:cBhvr>
+                                      <p:to>
+                                        <p:strVal val="visible"/>
+                                      </p:to>
+                                    </p:set>
+                                    <p:animEffect transition="in" filter="fade">
+                                      <p:cBhvr>
+                                        <p:cTn id="19" dur="500"/>
+                                        <p:tgtEl>
+                                          <p:spTgt spid="5"/>
+                                        </p:tgtEl>
+                                      </p:cBhvr>
+                                    </p:animEffect>
+                                  </p:childTnLst>
+                                </p:cTn>
+                              </p:par>
+                            </p:childTnLst>
+                          </p:cTn>
+                        </p:par>
+                      </p:childTnLst>
+                    </p:cTn>
+                  </p:par>
+                </p:childTnLst>
+              </p:cTn>
+              <p:prevCondLst>
+                <p:cond evt="onPrev" delay="0">
+                  <p:tgtEl>
+                    <p:sldTgt/>
+                  </p:tgtEl>
+                </p:cond>
+              </p:prevCondLst>
+              <p:nextCondLst>
+                <p:cond evt="onNext" delay="0">
+                  <p:tgtEl>
+                    <p:sldTgt/>
+                  </p:tgtEl>
+                </p:cond>
+              </p:nextCondLst>
+            </p:seq>
+          </p:childTnLst>
+        </p:cTn>
+      </p:par>
+    </p:tnLst>
+    <p:bldLst>
+      <p:bldP spid="7" grpId="0" build="p"/>
+    </p:bldLst>
+  </p:timing>
 </p:sld>
 </file>
 
@@ -3843,6 +4119,85 @@
   <p:clrMapOvr>
     <a:masterClrMapping/>
   </p:clrMapOvr>
+  <p:timing>
+    <p:tnLst>
+      <p:par>
+        <p:cTn id="1" dur="indefinite" restart="never" nodeType="tmRoot">
+          <p:childTnLst>
+            <p:seq concurrent="1" nextAc="seek">
+              <p:cTn id="2" dur="indefinite" nodeType="mainSeq">
+                <p:childTnLst>
+                  <p:par>
+                    <p:cTn id="3" fill="hold">
+                      <p:stCondLst>
+                        <p:cond delay="indefinite"/>
+                      </p:stCondLst>
+                      <p:childTnLst>
+                        <p:par>
+                          <p:cTn id="4" fill="hold">
+                            <p:stCondLst>
+                              <p:cond delay="0"/>
+                            </p:stCondLst>
+                            <p:childTnLst>
+                              <p:par>
+                                <p:cTn id="5" presetID="1" presetClass="entr" presetSubtype="0" fill="hold" nodeType="clickEffect">
+                                  <p:stCondLst>
+                                    <p:cond delay="0"/>
+                                  </p:stCondLst>
+                                  <p:childTnLst>
+                                    <p:set>
+                                      <p:cBhvr>
+                                        <p:cTn id="6" dur="1" fill="hold">
+                                          <p:stCondLst>
+                                            <p:cond delay="0"/>
+                                          </p:stCondLst>
+                                        </p:cTn>
+                                        <p:tgtEl>
+                                          <p:spTgt spid="3">
+                                            <p:txEl>
+                                              <p:pRg st="0" end="0"/>
+                                            </p:txEl>
+                                          </p:spTgt>
+                                        </p:tgtEl>
+                                        <p:attrNameLst>
+                                          <p:attrName>style.visibility</p:attrName>
+                                        </p:attrNameLst>
+                                      </p:cBhvr>
+                                      <p:to>
+                                        <p:strVal val="visible"/>
+                                      </p:to>
+                                    </p:set>
+                                  </p:childTnLst>
+                                </p:cTn>
+                              </p:par>
+                            </p:childTnLst>
+                          </p:cTn>
+                        </p:par>
+                      </p:childTnLst>
+                    </p:cTn>
+                  </p:par>
+                </p:childTnLst>
+              </p:cTn>
+              <p:prevCondLst>
+                <p:cond evt="onPrev" delay="0">
+                  <p:tgtEl>
+                    <p:sldTgt/>
+                  </p:tgtEl>
+                </p:cond>
+              </p:prevCondLst>
+              <p:nextCondLst>
+                <p:cond evt="onNext" delay="0">
+                  <p:tgtEl>
+                    <p:sldTgt/>
+                  </p:tgtEl>
+                </p:cond>
+              </p:nextCondLst>
+            </p:seq>
+          </p:childTnLst>
+        </p:cTn>
+      </p:par>
+    </p:tnLst>
+  </p:timing>
 </p:sld>
 </file>
 
@@ -3896,7 +4251,7 @@
           <a:p>
             <a:r>
               <a:rPr lang="en-US" b="1" dirty="0"/>
-              <a:t>So is this useful for us?</a:t>
+              <a:t>So, what did we learn?</a:t>
             </a:r>
           </a:p>
         </p:txBody>
@@ -3924,54 +4279,25 @@
           </a:bodyPr>
           <a:lstStyle/>
           <a:p>
-            <a:pPr marL="0" indent="0">
-              <a:buNone/>
-            </a:pPr>
             <a:r>
               <a:rPr lang="en-US" sz="2800" dirty="0"/>
-              <a:t>Potentially yes, if it helps you reason about the requirements of a system.</a:t>
-            </a:r>
-          </a:p>
-          <a:p>
-            <a:pPr marL="0" indent="0">
-              <a:buNone/>
-            </a:pPr>
-            <a:endParaRPr lang="en-US" sz="2800" dirty="0"/>
-          </a:p>
-          <a:p>
-            <a:pPr marL="0" indent="0">
-              <a:buNone/>
-            </a:pPr>
+              <a:t>Asynchrony is a noun and asynchronously is an adverb.</a:t>
+            </a:r>
+          </a:p>
+          <a:p>
             <a:r>
               <a:rPr lang="en-US" sz="2800" dirty="0"/>
-              <a:t>And who doesn’t love a </a:t>
-            </a:r>
-            <a:r>
-              <a:rPr lang="en-US" sz="2800"/>
-              <a:t>new word?</a:t>
-            </a:r>
-          </a:p>
-          <a:p>
-            <a:pPr marL="0" indent="0">
-              <a:buNone/>
-            </a:pPr>
-            <a:endParaRPr lang="en-US" sz="2800" dirty="0"/>
-          </a:p>
-          <a:p>
-            <a:pPr marL="0" indent="0">
-              <a:buNone/>
-            </a:pPr>
+              <a:t>What is useful is being intentional in design.</a:t>
+            </a:r>
+          </a:p>
+          <a:p>
+            <a:r>
+              <a:rPr lang="en-US" sz="2800" i="1" dirty="0"/>
+              <a:t>“Async in PowerShell is never a good idea” </a:t>
+            </a:r>
             <a:r>
               <a:rPr lang="en-US" sz="2800" dirty="0"/>
-              <a:t>But it may just be another word to store in the </a:t>
-            </a:r>
-            <a:r>
-              <a:rPr lang="en-US" sz="2800" dirty="0" err="1"/>
-              <a:t>bikeshed</a:t>
-            </a:r>
-            <a:r>
-              <a:rPr lang="en-US" sz="2800" dirty="0"/>
-              <a:t>.</a:t>
+              <a:t>- Rain</a:t>
             </a:r>
           </a:p>
         </p:txBody>
@@ -3986,6 +4312,186 @@
   <p:clrMapOvr>
     <a:masterClrMapping/>
   </p:clrMapOvr>
+  <p:timing>
+    <p:tnLst>
+      <p:par>
+        <p:cTn id="1" dur="indefinite" restart="never" nodeType="tmRoot">
+          <p:childTnLst>
+            <p:seq concurrent="1" nextAc="seek">
+              <p:cTn id="2" dur="indefinite" nodeType="mainSeq">
+                <p:childTnLst>
+                  <p:par>
+                    <p:cTn id="3" fill="hold">
+                      <p:stCondLst>
+                        <p:cond delay="indefinite"/>
+                      </p:stCondLst>
+                      <p:childTnLst>
+                        <p:par>
+                          <p:cTn id="4" fill="hold">
+                            <p:stCondLst>
+                              <p:cond delay="0"/>
+                            </p:stCondLst>
+                            <p:childTnLst>
+                              <p:par>
+                                <p:cTn id="5" presetID="1" presetClass="entr" presetSubtype="0" fill="hold" grpId="0" nodeType="clickEffect">
+                                  <p:stCondLst>
+                                    <p:cond delay="0"/>
+                                  </p:stCondLst>
+                                  <p:childTnLst>
+                                    <p:set>
+                                      <p:cBhvr>
+                                        <p:cTn id="6" dur="1" fill="hold">
+                                          <p:stCondLst>
+                                            <p:cond delay="0"/>
+                                          </p:stCondLst>
+                                        </p:cTn>
+                                        <p:tgtEl>
+                                          <p:spTgt spid="3">
+                                            <p:txEl>
+                                              <p:pRg st="0" end="0"/>
+                                            </p:txEl>
+                                          </p:spTgt>
+                                        </p:tgtEl>
+                                        <p:attrNameLst>
+                                          <p:attrName>style.visibility</p:attrName>
+                                        </p:attrNameLst>
+                                      </p:cBhvr>
+                                      <p:to>
+                                        <p:strVal val="visible"/>
+                                      </p:to>
+                                    </p:set>
+                                  </p:childTnLst>
+                                </p:cTn>
+                              </p:par>
+                            </p:childTnLst>
+                          </p:cTn>
+                        </p:par>
+                      </p:childTnLst>
+                    </p:cTn>
+                  </p:par>
+                  <p:par>
+                    <p:cTn id="7" fill="hold">
+                      <p:stCondLst>
+                        <p:cond delay="indefinite"/>
+                      </p:stCondLst>
+                      <p:childTnLst>
+                        <p:par>
+                          <p:cTn id="8" fill="hold">
+                            <p:stCondLst>
+                              <p:cond delay="0"/>
+                            </p:stCondLst>
+                            <p:childTnLst>
+                              <p:par>
+                                <p:cTn id="9" presetID="1" presetClass="entr" presetSubtype="0" fill="hold" grpId="0" nodeType="clickEffect">
+                                  <p:stCondLst>
+                                    <p:cond delay="0"/>
+                                  </p:stCondLst>
+                                  <p:childTnLst>
+                                    <p:set>
+                                      <p:cBhvr>
+                                        <p:cTn id="10" dur="1" fill="hold">
+                                          <p:stCondLst>
+                                            <p:cond delay="0"/>
+                                          </p:stCondLst>
+                                        </p:cTn>
+                                        <p:tgtEl>
+                                          <p:spTgt spid="3">
+                                            <p:txEl>
+                                              <p:pRg st="1" end="1"/>
+                                            </p:txEl>
+                                          </p:spTgt>
+                                        </p:tgtEl>
+                                        <p:attrNameLst>
+                                          <p:attrName>style.visibility</p:attrName>
+                                        </p:attrNameLst>
+                                      </p:cBhvr>
+                                      <p:to>
+                                        <p:strVal val="visible"/>
+                                      </p:to>
+                                    </p:set>
+                                  </p:childTnLst>
+                                </p:cTn>
+                              </p:par>
+                            </p:childTnLst>
+                          </p:cTn>
+                        </p:par>
+                      </p:childTnLst>
+                    </p:cTn>
+                  </p:par>
+                  <p:par>
+                    <p:cTn id="11" fill="hold">
+                      <p:stCondLst>
+                        <p:cond delay="indefinite"/>
+                      </p:stCondLst>
+                      <p:childTnLst>
+                        <p:par>
+                          <p:cTn id="12" fill="hold">
+                            <p:stCondLst>
+                              <p:cond delay="0"/>
+                            </p:stCondLst>
+                            <p:childTnLst>
+                              <p:par>
+                                <p:cTn id="13" presetID="1" presetClass="entr" presetSubtype="0" fill="hold" grpId="0" nodeType="clickEffect">
+                                  <p:stCondLst>
+                                    <p:cond delay="0"/>
+                                  </p:stCondLst>
+                                  <p:childTnLst>
+                                    <p:set>
+                                      <p:cBhvr>
+                                        <p:cTn id="14" dur="1" fill="hold">
+                                          <p:stCondLst>
+                                            <p:cond delay="0"/>
+                                          </p:stCondLst>
+                                        </p:cTn>
+                                        <p:tgtEl>
+                                          <p:spTgt spid="3">
+                                            <p:txEl>
+                                              <p:pRg st="2" end="2"/>
+                                            </p:txEl>
+                                          </p:spTgt>
+                                        </p:tgtEl>
+                                        <p:attrNameLst>
+                                          <p:attrName>style.visibility</p:attrName>
+                                        </p:attrNameLst>
+                                      </p:cBhvr>
+                                      <p:to>
+                                        <p:strVal val="visible"/>
+                                      </p:to>
+                                    </p:set>
+                                  </p:childTnLst>
+                                </p:cTn>
+                              </p:par>
+                            </p:childTnLst>
+                          </p:cTn>
+                        </p:par>
+                      </p:childTnLst>
+                    </p:cTn>
+                  </p:par>
+                </p:childTnLst>
+              </p:cTn>
+              <p:prevCondLst>
+                <p:cond evt="onPrev" delay="0">
+                  <p:tgtEl>
+                    <p:sldTgt/>
+                  </p:tgtEl>
+                </p:cond>
+              </p:prevCondLst>
+              <p:nextCondLst>
+                <p:cond evt="onNext" delay="0">
+                  <p:tgtEl>
+                    <p:sldTgt/>
+                  </p:tgtEl>
+                </p:cond>
+              </p:nextCondLst>
+            </p:seq>
+          </p:childTnLst>
+        </p:cTn>
+      </p:par>
+    </p:tnLst>
+    <p:bldLst>
+      <p:bldP spid="3" grpId="0" build="p"/>
+    </p:bldLst>
+  </p:timing>
 </p:sld>
 </file>
 
